--- a/Topic_D/Exam_Practice/TD-L10_Writing_Workshop_Career_Plans_Ambitions_and_Choices.pptx
+++ b/Topic_D/Exam_Practice/TD-L10_Writing_Workshop_Career_Plans_Ambitions_and_Choices.pptx
@@ -784,7 +784,11 @@
           <a:lstStyle/>
           <a:p>
             <a:r>
-              <a:rPr lang="en-US" dirty="0"/>
+              <a:rPr lang="ar-SA" dirty="0">
+                <a:latin typeface="Amiri" pitchFamily="2" charset="-78"/>
+                <a:ea typeface="Amiri" pitchFamily="2" charset="-78"/>
+                <a:cs typeface="Amiri" pitchFamily="2" charset="-78"/>
+              </a:rPr>
               <a:t>Q3 (3 min to choose and read). Title (أ) suits Core and Develop; title (ب) suits Stretch.</a:t>
             </a:r>
             <a:endParaRPr lang="en-US" dirty="0"/>
@@ -1403,7 +1407,11 @@
           <a:lstStyle/>
           <a:p>
             <a:r>
-              <a:rPr lang="en-US" dirty="0"/>
+              <a:rPr lang="ar-SA" dirty="0">
+                <a:latin typeface="Amiri" pitchFamily="2" charset="-78"/>
+                <a:ea typeface="Amiri" pitchFamily="2" charset="-78"/>
+                <a:cs typeface="Amiri" pitchFamily="2" charset="-78"/>
+              </a:rPr>
               <a:t>WELCOME (1 min) — while students join.
 • Greet each student by name as they arrive: السَّلَامُ عَلَيْكُمْ. Take the register (Pastoral Tracker: attendance 0/1).
 • 2-MINUTE CHECK-IN (SEND training): a private chat to any student who seemed unsettled last lesson — “Are you okay today? 👍 / 👎”.
@@ -1936,7 +1944,11 @@
           <a:lstStyle/>
           <a:p>
             <a:r>
-              <a:rPr lang="en-US" dirty="0"/>
+              <a:rPr lang="ar-SA" dirty="0">
+                <a:latin typeface="Amiri" pitchFamily="2" charset="-78"/>
+                <a:ea typeface="Amiri" pitchFamily="2" charset="-78"/>
+                <a:cs typeface="Amiri" pitchFamily="2" charset="-78"/>
+              </a:rPr>
               <a:t>Question words: سَتَدْرُسِينَ (will study — FUTURE) · تَحْلُمِينَ بِهَا (you dream of) · أَثَّرَتْ (influenced — PAST) · البَدِيلَةُ (alternative — use idhā lam … fa-sa-).</a:t>
             </a:r>
             <a:endParaRPr lang="en-US" dirty="0"/>
@@ -2508,6 +2520,7 @@
                   <a:srgbClr val="D4AF37"/>
                 </a:solidFill>
                 <a:latin typeface="Amiri" pitchFamily="2" charset="-78"/>
+                <a:ea typeface="Amiri" pitchFamily="2" charset="-78"/>
                 <a:cs typeface="Amiri" pitchFamily="2" charset="-78"/>
               </a:rPr>
               <a:t>م</a:t>
@@ -2714,6 +2727,7 @@
                   <a:srgbClr val="D4AF37"/>
                 </a:solidFill>
                 <a:latin typeface="Amiri" pitchFamily="2" charset="-78"/>
+                <a:ea typeface="Amiri" pitchFamily="2" charset="-78"/>
                 <a:cs typeface="Amiri" pitchFamily="2" charset="-78"/>
               </a:rPr>
               <a:t>وَرْشَةُ الكِتَابَةِ — الخُطَطُ وَالطُّمُوحَاتُ</a:t>
@@ -3171,6 +3185,7 @@
                   <a:srgbClr val="D4AF37"/>
                 </a:solidFill>
                 <a:latin typeface="Amiri" pitchFamily="2" charset="-78"/>
+                <a:ea typeface="Amiri" pitchFamily="2" charset="-78"/>
                 <a:cs typeface="Amiri" pitchFamily="2" charset="-78"/>
               </a:rPr>
               <a:t>م</a:t>
@@ -3491,6 +3506,7 @@
                   <a:srgbClr val="8A6D1E"/>
                 </a:solidFill>
                 <a:latin typeface="Amiri" pitchFamily="2" charset="-78"/>
+                <a:ea typeface="Amiri" pitchFamily="2" charset="-78"/>
                 <a:cs typeface="Amiri" pitchFamily="2" charset="-78"/>
               </a:rPr>
               <a:t>نَمُوذَجُ الإِجَابَةِ</a:t>
@@ -3604,6 +3620,7 @@
                   <a:srgbClr val="1F2A37"/>
                 </a:solidFill>
                 <a:latin typeface="Amiri" pitchFamily="2" charset="-78"/>
+                <a:ea typeface="Amiri" pitchFamily="2" charset="-78"/>
                 <a:cs typeface="Amiri" pitchFamily="2" charset="-78"/>
               </a:rPr>
               <a:t>مَرْحَبًا يَا خَالَتِي،</a:t>
@@ -3623,6 +3640,7 @@
                   <a:srgbClr val="1F2A37"/>
                 </a:solidFill>
                 <a:latin typeface="Amiri" pitchFamily="2" charset="-78"/>
+                <a:ea typeface="Amiri" pitchFamily="2" charset="-78"/>
                 <a:cs typeface="Amiri" pitchFamily="2" charset="-78"/>
               </a:rPr>
               <a:t>كَيْفَ حَالُكِ؟ أُرِيدُ أَنْ أُخْبِرَكِ عَنْ خِطَطِي لِلْمُسْتَقْبَلِ. بَعْدَ الامْتِحَانَاتِ سَأَدْرُسُ الأَحْيَاءَ وَالكِيمْيَاءَ فِي الكُلِّيَّةِ. أَتَمَنَّى أَنْ أُصْبِحَ طَبِيبَةً، لِأَنِّي أُحِبُّ مُسَاعَدَةَ النَّاسِ. فِي الشَّهْرِ المَاضِي زُرْتُ مُسْتَشْفًى مَعَ مَدْرَسَتِي، وَتَكَلَّمْتُ مَعَ طَبِيبَةٍ لَطِيفَةٍ، فَأَعْجَبَنِي عَمَلُهَا كَثِيرًا. فِي رَأْيِي، الطِّبُّ صَعْبٌ لٰكِنَّهُ مِهْنَةٌ رَائِعَةٌ. إِذَا لَمْ أُقْبَلْ فِي كُلِّيَّةِ الطِّبِّ، فَسَأَدْرُسُ التَّمْرِيضَ. هَلْ تَسْتَطِيعِينَ أَنْ تُسَاعِدِينِي فِي اخْتِيَارِ الجَامِعَةِ؟</a:t>
@@ -3642,6 +3660,7 @@
                   <a:srgbClr val="1F2A37"/>
                 </a:solidFill>
                 <a:latin typeface="Amiri" pitchFamily="2" charset="-78"/>
+                <a:ea typeface="Amiri" pitchFamily="2" charset="-78"/>
                 <a:cs typeface="Amiri" pitchFamily="2" charset="-78"/>
               </a:rPr>
               <a:t>مَعَ حُبِّي،</a:t>
@@ -3661,6 +3680,7 @@
                   <a:srgbClr val="1F2A37"/>
                 </a:solidFill>
                 <a:latin typeface="Amiri" pitchFamily="2" charset="-78"/>
+                <a:ea typeface="Amiri" pitchFamily="2" charset="-78"/>
                 <a:cs typeface="Amiri" pitchFamily="2" charset="-78"/>
               </a:rPr>
               <a:t>سَلْمَى</a:t>
@@ -3824,11 +3844,12 @@
               <a:buNone/>
             </a:pPr>
             <a:r>
-              <a:rPr lang="en-US" sz="950" b="1" dirty="0">
+              <a:rPr lang="ar-SA" sz="950" b="1" dirty="0">
                 <a:solidFill>
                   <a:srgbClr val="FFFFFF"/>
                 </a:solidFill>
                 <a:latin typeface="Calibri" pitchFamily="34" charset="0"/>
+                <a:ea typeface="Amiri" pitchFamily="2" charset="-78"/>
                 <a:cs typeface="Amiri" pitchFamily="2" charset="-78"/>
               </a:rPr>
               <a:t>سَأَدْرُسُ الأَحْيَاءَ</a:t>
@@ -3889,11 +3910,12 @@
               <a:buNone/>
             </a:pPr>
             <a:r>
-              <a:rPr lang="en-US" sz="950" b="1" dirty="0">
+              <a:rPr lang="ar-SA" sz="950" b="1" dirty="0">
                 <a:solidFill>
                   <a:srgbClr val="FFFFFF"/>
                 </a:solidFill>
                 <a:latin typeface="Calibri" pitchFamily="34" charset="0"/>
+                <a:ea typeface="Amiri" pitchFamily="2" charset="-78"/>
                 <a:cs typeface="Amiri" pitchFamily="2" charset="-78"/>
               </a:rPr>
               <a:t>أَتَمَنَّى أَنْ أُصْبِحَ</a:t>
@@ -3954,11 +3976,12 @@
               <a:buNone/>
             </a:pPr>
             <a:r>
-              <a:rPr lang="en-US" sz="950" b="1" dirty="0">
+              <a:rPr lang="ar-SA" sz="950" b="1" dirty="0">
                 <a:solidFill>
                   <a:srgbClr val="FFFFFF"/>
                 </a:solidFill>
                 <a:latin typeface="Calibri" pitchFamily="34" charset="0"/>
+                <a:ea typeface="Amiri" pitchFamily="2" charset="-78"/>
                 <a:cs typeface="Amiri" pitchFamily="2" charset="-78"/>
               </a:rPr>
               <a:t>فَأَعْجَبَنِي</a:t>
@@ -4019,11 +4042,12 @@
               <a:buNone/>
             </a:pPr>
             <a:r>
-              <a:rPr lang="en-US" sz="950" b="1" dirty="0">
+              <a:rPr lang="ar-SA" sz="950" b="1" dirty="0">
                 <a:solidFill>
                   <a:srgbClr val="FFFFFF"/>
                 </a:solidFill>
                 <a:latin typeface="Calibri" pitchFamily="34" charset="0"/>
+                <a:ea typeface="Amiri" pitchFamily="2" charset="-78"/>
                 <a:cs typeface="Amiri" pitchFamily="2" charset="-78"/>
               </a:rPr>
               <a:t>إِذَا لَمْ أُقْبَلْ</a:t>
@@ -4157,6 +4181,7 @@
                   <a:srgbClr val="D4AF37"/>
                 </a:solidFill>
                 <a:latin typeface="Amiri" pitchFamily="2" charset="-78"/>
+                <a:ea typeface="Amiri" pitchFamily="2" charset="-78"/>
                 <a:cs typeface="Amiri" pitchFamily="2" charset="-78"/>
               </a:rPr>
               <a:t>م</a:t>
@@ -4477,6 +4502,7 @@
                   <a:srgbClr val="8A6D1E"/>
                 </a:solidFill>
                 <a:latin typeface="Amiri" pitchFamily="2" charset="-78"/>
+                <a:ea typeface="Amiri" pitchFamily="2" charset="-78"/>
                 <a:cs typeface="Amiri" pitchFamily="2" charset="-78"/>
               </a:rPr>
               <a:t>نَمُوذَجُ الإِجَابَةِ</a:t>
@@ -4590,6 +4616,7 @@
                   <a:srgbClr val="1F2A37"/>
                 </a:solidFill>
                 <a:latin typeface="Amiri" pitchFamily="2" charset="-78"/>
+                <a:ea typeface="Amiri" pitchFamily="2" charset="-78"/>
                 <a:cs typeface="Amiri" pitchFamily="2" charset="-78"/>
               </a:rPr>
               <a:t>خَالَتِيَ العَزِيزَةَ،</a:t>
@@ -4609,6 +4636,7 @@
                   <a:srgbClr val="1F2A37"/>
                 </a:solidFill>
                 <a:latin typeface="Amiri" pitchFamily="2" charset="-78"/>
+                <a:ea typeface="Amiri" pitchFamily="2" charset="-78"/>
                 <a:cs typeface="Amiri" pitchFamily="2" charset="-78"/>
               </a:rPr>
               <a:t>بِمَا أَنَّكِ أَوَّلُ مَنْ شَجَّعَنِي عَلَى دِرَاسَةِ العُلُومِ، أَرَدْتُ أَنْ تَكُونِي أَوَّلَ مَنْ يَعْرِفُ قَرَارِي: سَأَدْرُسُ الأَحْيَاءَ وَالكِيمْيَاءَ فِي المَرْحَلَةِ القَادِمَةِ، وَأَطْمَحُ إِلَى أَنْ أُصْبِحَ طَبِيبَةَ أَطْفَالٍ. وَقَدْ تَأَكَّدَ هٰذَا الحُلْمُ عِنْدَمَا زُرْنَا المُسْتَشْفَى الشَّهْرَ المَاضِي، وَرَأَيْتُ كَيْفَ تُطَمْئِنُ طَبِيبَةٌ شَابَّةٌ طِفْلًا خَائِفًا قَبْلَ العَمَلِيَّةِ. صَحِيحٌ أَنَّ الطَّرِيقَ طَوِيلٌ، غَيْرَ أَنِّي لَنْ أَسْتَسْلِمَ بِسُهُولَةٍ؛ وَإِذَا لَمْ أُقْبَلْ فِي الطِّبِّ، فَسَأَدْرُسُ التَّمْرِيضَ، ثُمَّ أُحَاوِلُ مِنْ جَدِيدٍ. وَأَتَمَنَّى أَنْ تُسَاعِدِينِي فِي زِيَارَةِ الجَامِعَاتِ وَاخْتِيَارِ أَفْضَلِهَا هٰذَا الصَّيْفَ.</a:t>
@@ -4628,6 +4656,7 @@
                   <a:srgbClr val="1F2A37"/>
                 </a:solidFill>
                 <a:latin typeface="Amiri" pitchFamily="2" charset="-78"/>
+                <a:ea typeface="Amiri" pitchFamily="2" charset="-78"/>
                 <a:cs typeface="Amiri" pitchFamily="2" charset="-78"/>
               </a:rPr>
               <a:t>مَعَ حُبِّي وَامْتِنَانِي،</a:t>
@@ -4647,6 +4676,7 @@
                   <a:srgbClr val="1F2A37"/>
                 </a:solidFill>
                 <a:latin typeface="Amiri" pitchFamily="2" charset="-78"/>
+                <a:ea typeface="Amiri" pitchFamily="2" charset="-78"/>
                 <a:cs typeface="Amiri" pitchFamily="2" charset="-78"/>
               </a:rPr>
               <a:t>سَلْمَى</a:t>
@@ -4810,11 +4840,12 @@
               <a:buNone/>
             </a:pPr>
             <a:r>
-              <a:rPr lang="en-US" sz="950" b="1" dirty="0">
+              <a:rPr lang="ar-SA" sz="950" b="1" dirty="0">
                 <a:solidFill>
                   <a:srgbClr val="FFFFFF"/>
                 </a:solidFill>
                 <a:latin typeface="Calibri" pitchFamily="34" charset="0"/>
+                <a:ea typeface="Amiri" pitchFamily="2" charset="-78"/>
                 <a:cs typeface="Amiri" pitchFamily="2" charset="-78"/>
               </a:rPr>
               <a:t>بِمَا أَنَّكِ</a:t>
@@ -4875,11 +4906,12 @@
               <a:buNone/>
             </a:pPr>
             <a:r>
-              <a:rPr lang="en-US" sz="950" b="1" dirty="0">
+              <a:rPr lang="ar-SA" sz="950" b="1" dirty="0">
                 <a:solidFill>
                   <a:srgbClr val="FFFFFF"/>
                 </a:solidFill>
                 <a:latin typeface="Calibri" pitchFamily="34" charset="0"/>
+                <a:ea typeface="Amiri" pitchFamily="2" charset="-78"/>
                 <a:cs typeface="Amiri" pitchFamily="2" charset="-78"/>
               </a:rPr>
               <a:t>أَطْمَحُ إِلَى أَنْ</a:t>
@@ -4940,11 +4972,12 @@
               <a:buNone/>
             </a:pPr>
             <a:r>
-              <a:rPr lang="en-US" sz="950" b="1" dirty="0">
+              <a:rPr lang="ar-SA" sz="950" b="1" dirty="0">
                 <a:solidFill>
                   <a:srgbClr val="FFFFFF"/>
                 </a:solidFill>
                 <a:latin typeface="Calibri" pitchFamily="34" charset="0"/>
+                <a:ea typeface="Amiri" pitchFamily="2" charset="-78"/>
                 <a:cs typeface="Amiri" pitchFamily="2" charset="-78"/>
               </a:rPr>
               <a:t>لَنْ أَسْتَسْلِمَ</a:t>
@@ -5005,11 +5038,12 @@
               <a:buNone/>
             </a:pPr>
             <a:r>
-              <a:rPr lang="en-US" sz="950" b="1" dirty="0">
+              <a:rPr lang="ar-SA" sz="950" b="1" dirty="0">
                 <a:solidFill>
                   <a:srgbClr val="FFFFFF"/>
                 </a:solidFill>
                 <a:latin typeface="Calibri" pitchFamily="34" charset="0"/>
+                <a:ea typeface="Amiri" pitchFamily="2" charset="-78"/>
                 <a:cs typeface="Amiri" pitchFamily="2" charset="-78"/>
               </a:rPr>
               <a:t>إِذَا لَمْ أُقْبَلْ … فَسَأَدْرُسُ</a:t>
@@ -5143,6 +5177,7 @@
                   <a:srgbClr val="D4AF37"/>
                 </a:solidFill>
                 <a:latin typeface="Amiri" pitchFamily="2" charset="-78"/>
+                <a:ea typeface="Amiri" pitchFamily="2" charset="-78"/>
                 <a:cs typeface="Amiri" pitchFamily="2" charset="-78"/>
               </a:rPr>
               <a:t>م</a:t>
@@ -5463,6 +5498,7 @@
                   <a:srgbClr val="8A6D1E"/>
                 </a:solidFill>
                 <a:latin typeface="Amiri" pitchFamily="2" charset="-78"/>
+                <a:ea typeface="Amiri" pitchFamily="2" charset="-78"/>
                 <a:cs typeface="Amiri" pitchFamily="2" charset="-78"/>
               </a:rPr>
               <a:t>اخْتَرْ عُنْوَانًا وَاحِدًا</a:t>
@@ -5743,6 +5779,7 @@
                   <a:srgbClr val="1B3B6F"/>
                 </a:solidFill>
                 <a:latin typeface="Amiri" pitchFamily="2" charset="-78"/>
+                <a:ea typeface="Amiri" pitchFamily="2" charset="-78"/>
                 <a:cs typeface="Amiri" pitchFamily="2" charset="-78"/>
               </a:rPr>
               <a:t>طُمُوحَاتِي لِلْمُسْتَقْبَلِ</a:t>
@@ -5781,6 +5818,7 @@
                   <a:srgbClr val="1B3B6F"/>
                 </a:solidFill>
                 <a:latin typeface="Amiri" pitchFamily="2" charset="-78"/>
+                <a:ea typeface="Amiri" pitchFamily="2" charset="-78"/>
                 <a:cs typeface="Amiri" pitchFamily="2" charset="-78"/>
               </a:rPr>
               <a:t>(أ)</a:t>
@@ -5887,6 +5925,7 @@
                   <a:srgbClr val="1B3B6F"/>
                 </a:solidFill>
                 <a:latin typeface="Amiri" pitchFamily="2" charset="-78"/>
+                <a:ea typeface="Amiri" pitchFamily="2" charset="-78"/>
                 <a:cs typeface="Amiri" pitchFamily="2" charset="-78"/>
               </a:rPr>
               <a:t>دِرَاسَتُكَ القَادِمَةُ · حُلْمُكَ المِهْنِيُّ وَسَبَبُهُ · تَجْرِبَةٌ أَثَّرَتْ فِي اخْتِيَارِكَ · خُطَّتُكَ البَدِيلَةُ</a:t>
@@ -6018,6 +6057,7 @@
                   <a:srgbClr val="1B3B6F"/>
                 </a:solidFill>
                 <a:latin typeface="Amiri" pitchFamily="2" charset="-78"/>
+                <a:ea typeface="Amiri" pitchFamily="2" charset="-78"/>
                 <a:cs typeface="Amiri" pitchFamily="2" charset="-78"/>
               </a:rPr>
               <a:t>الشَّغَفُ أَمِ الأَمَانُ؟</a:t>
@@ -6056,6 +6096,7 @@
                   <a:srgbClr val="1B3B6F"/>
                 </a:solidFill>
                 <a:latin typeface="Amiri" pitchFamily="2" charset="-78"/>
+                <a:ea typeface="Amiri" pitchFamily="2" charset="-78"/>
                 <a:cs typeface="Amiri" pitchFamily="2" charset="-78"/>
               </a:rPr>
               <a:t>(ب)</a:t>
@@ -6159,6 +6200,7 @@
                   <a:srgbClr val="1B3B6F"/>
                 </a:solidFill>
                 <a:latin typeface="Amiri" pitchFamily="2" charset="-78"/>
+                <a:ea typeface="Amiri" pitchFamily="2" charset="-78"/>
                 <a:cs typeface="Amiri" pitchFamily="2" charset="-78"/>
               </a:rPr>
               <a:t>الاخْتِيَارُ الصَّعْبُ · مَزَايَا كُلِّ طَرِيقٍ · مِثَالٌ مِنَ الوَاقِعِ · رَأْيُكَ</a:t>
@@ -6358,6 +6400,7 @@
                   <a:srgbClr val="D4AF37"/>
                 </a:solidFill>
                 <a:latin typeface="Amiri" pitchFamily="2" charset="-78"/>
+                <a:ea typeface="Amiri" pitchFamily="2" charset="-78"/>
                 <a:cs typeface="Amiri" pitchFamily="2" charset="-78"/>
               </a:rPr>
               <a:t>م</a:t>
@@ -6678,6 +6721,7 @@
                   <a:srgbClr val="8A6D1E"/>
                 </a:solidFill>
                 <a:latin typeface="Amiri" pitchFamily="2" charset="-78"/>
+                <a:ea typeface="Amiri" pitchFamily="2" charset="-78"/>
                 <a:cs typeface="Amiri" pitchFamily="2" charset="-78"/>
               </a:rPr>
               <a:t>خُطَّةُ الكِتَابَةِ</a:t>
@@ -7302,6 +7346,7 @@
                   <a:srgbClr val="1B3B6F"/>
                 </a:solidFill>
                 <a:latin typeface="Amiri" pitchFamily="2" charset="-78"/>
+                <a:ea typeface="Amiri" pitchFamily="2" charset="-78"/>
                 <a:cs typeface="Amiri" pitchFamily="2" charset="-78"/>
               </a:rPr>
               <a:t>حُلْمِي أَنْ أُصْبِحَ مُبَرْمِجًا.</a:t>
@@ -7401,6 +7446,7 @@
                   <a:srgbClr val="1B3B6F"/>
                 </a:solidFill>
                 <a:latin typeface="Amiri" pitchFamily="2" charset="-78"/>
+                <a:ea typeface="Amiri" pitchFamily="2" charset="-78"/>
                 <a:cs typeface="Amiri" pitchFamily="2" charset="-78"/>
               </a:rPr>
               <a:t>حَضَرْتُ دَوْرَةً، فَعَرَفْتُ أَنَّ هٰذَا مَا أُرِيدُهُ.</a:t>
@@ -7500,6 +7546,7 @@
                   <a:srgbClr val="1B3B6F"/>
                 </a:solidFill>
                 <a:latin typeface="Amiri" pitchFamily="2" charset="-78"/>
+                <a:ea typeface="Amiri" pitchFamily="2" charset="-78"/>
                 <a:cs typeface="Amiri" pitchFamily="2" charset="-78"/>
               </a:rPr>
               <a:t>إِذَا لَمْ أُقْبَلْ، فَسَأَبْحَثُ عَنْ تَدْرِيبٍ مِهْنِيٍّ.</a:t>
@@ -7661,6 +7708,7 @@
                   <a:srgbClr val="1F2A37"/>
                 </a:solidFill>
                 <a:latin typeface="Amiri" pitchFamily="2" charset="-78"/>
+                <a:ea typeface="Amiri" pitchFamily="2" charset="-78"/>
                 <a:cs typeface="Amiri" pitchFamily="2" charset="-78"/>
               </a:rPr>
               <a:t>أ</a:t>
@@ -7687,6 +7735,7 @@
                   <a:srgbClr val="1F2A37"/>
                 </a:solidFill>
                 <a:latin typeface="Amiri" pitchFamily="2" charset="-78"/>
+                <a:ea typeface="Amiri" pitchFamily="2" charset="-78"/>
                 <a:cs typeface="Amiri" pitchFamily="2" charset="-78"/>
               </a:rPr>
               <a:t>ب</a:t>
@@ -7833,6 +7882,7 @@
                   <a:srgbClr val="D4AF37"/>
                 </a:solidFill>
                 <a:latin typeface="Amiri" pitchFamily="2" charset="-78"/>
+                <a:ea typeface="Amiri" pitchFamily="2" charset="-78"/>
                 <a:cs typeface="Amiri" pitchFamily="2" charset="-78"/>
               </a:rPr>
               <a:t>م</a:t>
@@ -8090,6 +8140,7 @@
                   <a:srgbClr val="8A6D1E"/>
                 </a:solidFill>
                 <a:latin typeface="Amiri" pitchFamily="2" charset="-78"/>
+                <a:ea typeface="Amiri" pitchFamily="2" charset="-78"/>
                 <a:cs typeface="Amiri" pitchFamily="2" charset="-78"/>
               </a:rPr>
               <a:t>أ</a:t>
@@ -8154,6 +8205,7 @@
                   <a:srgbClr val="1B3B6F"/>
                 </a:solidFill>
                 <a:latin typeface="Amiri" pitchFamily="2" charset="-78"/>
+                <a:ea typeface="Amiri" pitchFamily="2" charset="-78"/>
                 <a:cs typeface="Amiri" pitchFamily="2" charset="-78"/>
               </a:rPr>
               <a:t>أ</a:t>
@@ -8205,6 +8257,7 @@
                   <a:srgbClr val="8A6D1E"/>
                 </a:solidFill>
                 <a:latin typeface="Amiri" pitchFamily="2" charset="-78"/>
+                <a:ea typeface="Amiri" pitchFamily="2" charset="-78"/>
                 <a:cs typeface="Amiri" pitchFamily="2" charset="-78"/>
               </a:rPr>
               <a:t>نَمُوذَجُ الإِجَابَةِ</a:t>
@@ -8318,6 +8371,7 @@
                   <a:srgbClr val="1F2A37"/>
                 </a:solidFill>
                 <a:latin typeface="Amiri" pitchFamily="2" charset="-78"/>
+                <a:ea typeface="Amiri" pitchFamily="2" charset="-78"/>
                 <a:cs typeface="Amiri" pitchFamily="2" charset="-78"/>
               </a:rPr>
               <a:t>أَنَا فِي الصَّفِّ الحَادِي عَشَرَ، وَأُفَكِّرُ كَثِيرًا فِي مُسْتَقْبَلِي. بَعْدَ الامْتِحَانَاتِ سَأَدْرُسُ الرِّيَاضِيَّاتِ وَالفِيزْيَاءَ وَالحَاسُوبَ فِي كُلِّيَّةٍ قَرِيبَةٍ مِنْ بَيْتِي. ثُمَّ سَأَذْهَبُ إِلَى الجَامِعَةِ فِي مَدِينَةٍ كَبِيرَةٍ.</a:t>
@@ -8337,6 +8391,7 @@
                   <a:srgbClr val="1F2A37"/>
                 </a:solidFill>
                 <a:latin typeface="Amiri" pitchFamily="2" charset="-78"/>
+                <a:ea typeface="Amiri" pitchFamily="2" charset="-78"/>
                 <a:cs typeface="Amiri" pitchFamily="2" charset="-78"/>
               </a:rPr>
               <a:t>حُلْمِي أَنْ أُصْبِحَ مُبَرْمِجًا. أُحِبُّ الحَاسُوبَ مُنْذُ أَنْ كُنْتُ صَغِيرًا، وَأُحِبُّ حَلَّ المُشْكِلَاتِ. أَتَمَنَّى أَنْ أَعْمَلَ فِي شَرِكَةٍ كَبِيرَةٍ، ثُمَّ أُؤَسِّسَ شَرِكَتِي الخَاصَّةَ بَعْدَ عَشْرِ سَنَوَاتٍ.</a:t>
@@ -8356,6 +8411,7 @@
                   <a:srgbClr val="1F2A37"/>
                 </a:solidFill>
                 <a:latin typeface="Amiri" pitchFamily="2" charset="-78"/>
+                <a:ea typeface="Amiri" pitchFamily="2" charset="-78"/>
                 <a:cs typeface="Amiri" pitchFamily="2" charset="-78"/>
               </a:rPr>
               <a:t>عِنْدَمَا كُنْتُ صَغِيرًا، كُنْتُ أُرِيدُ أَنْ أَكُونَ لَاعِبَ كُرَةِ قَدَمٍ. لٰكِنْ فِي السَّنَةِ المَاضِيَةِ حَضَرْتُ دَوْرَةً فِي البَرْمَجَةِ، وَصَنَعْتُ لُعْبَةً صَغِيرَةً، فَعَرَفْتُ أَنَّ هٰذَا مَا أُرِيدُهُ. كَانَ المُعَلِّمُ سَعِيدًا جِدًّا بِلُعْبَتِي.</a:t>
@@ -8375,6 +8431,7 @@
                   <a:srgbClr val="1F2A37"/>
                 </a:solidFill>
                 <a:latin typeface="Amiri" pitchFamily="2" charset="-78"/>
+                <a:ea typeface="Amiri" pitchFamily="2" charset="-78"/>
                 <a:cs typeface="Amiri" pitchFamily="2" charset="-78"/>
               </a:rPr>
               <a:t>إِذَا حَصَلْتُ عَلَى دَرَجَاتٍ جَيِّدَةٍ، فَسَأَدْرُسُ عُلُومَ الحَاسُوبِ فِي جَامِعَةِ مَانْشِسْتَرَ. وَإِذَا لَمْ أُقْبَلْ، فَسَأَبْحَثُ عَنْ تَدْرِيبٍ مِهْنِيٍّ فِي شَرِكَةٍ. لَنْ أَتْرُكَ حُلْمِي أَبَدًا، مَهْمَا كَانَ الطَّرِيقُ صَعْبًا.</a:t>
@@ -8538,11 +8595,12 @@
               <a:buNone/>
             </a:pPr>
             <a:r>
-              <a:rPr lang="en-US" sz="950" b="1" dirty="0">
+              <a:rPr lang="ar-SA" sz="950" b="1" dirty="0">
                 <a:solidFill>
                   <a:srgbClr val="FFFFFF"/>
                 </a:solidFill>
                 <a:latin typeface="Calibri" pitchFamily="34" charset="0"/>
+                <a:ea typeface="Amiri" pitchFamily="2" charset="-78"/>
                 <a:cs typeface="Amiri" pitchFamily="2" charset="-78"/>
               </a:rPr>
               <a:t>سَأَدْرُسُ</a:t>
@@ -8603,11 +8661,12 @@
               <a:buNone/>
             </a:pPr>
             <a:r>
-              <a:rPr lang="en-US" sz="950" b="1" dirty="0">
+              <a:rPr lang="ar-SA" sz="950" b="1" dirty="0">
                 <a:solidFill>
                   <a:srgbClr val="FFFFFF"/>
                 </a:solidFill>
                 <a:latin typeface="Calibri" pitchFamily="34" charset="0"/>
+                <a:ea typeface="Amiri" pitchFamily="2" charset="-78"/>
                 <a:cs typeface="Amiri" pitchFamily="2" charset="-78"/>
               </a:rPr>
               <a:t>أَتَمَنَّى أَنْ أَعْمَلَ</a:t>
@@ -8668,11 +8727,12 @@
               <a:buNone/>
             </a:pPr>
             <a:r>
-              <a:rPr lang="en-US" sz="950" b="1" dirty="0">
+              <a:rPr lang="ar-SA" sz="950" b="1" dirty="0">
                 <a:solidFill>
                   <a:srgbClr val="FFFFFF"/>
                 </a:solidFill>
                 <a:latin typeface="Calibri" pitchFamily="34" charset="0"/>
+                <a:ea typeface="Amiri" pitchFamily="2" charset="-78"/>
                 <a:cs typeface="Amiri" pitchFamily="2" charset="-78"/>
               </a:rPr>
               <a:t>فَعَرَفْتُ أَنَّ</a:t>
@@ -8733,11 +8793,12 @@
               <a:buNone/>
             </a:pPr>
             <a:r>
-              <a:rPr lang="en-US" sz="950" b="1" dirty="0">
+              <a:rPr lang="ar-SA" sz="950" b="1" dirty="0">
                 <a:solidFill>
                   <a:srgbClr val="FFFFFF"/>
                 </a:solidFill>
                 <a:latin typeface="Calibri" pitchFamily="34" charset="0"/>
+                <a:ea typeface="Amiri" pitchFamily="2" charset="-78"/>
                 <a:cs typeface="Amiri" pitchFamily="2" charset="-78"/>
               </a:rPr>
               <a:t>لَنْ أَتْرُكَ</a:t>
@@ -8871,6 +8932,7 @@
                   <a:srgbClr val="D4AF37"/>
                 </a:solidFill>
                 <a:latin typeface="Amiri" pitchFamily="2" charset="-78"/>
+                <a:ea typeface="Amiri" pitchFamily="2" charset="-78"/>
                 <a:cs typeface="Amiri" pitchFamily="2" charset="-78"/>
               </a:rPr>
               <a:t>م</a:t>
@@ -9128,6 +9190,7 @@
                   <a:srgbClr val="8A6D1E"/>
                 </a:solidFill>
                 <a:latin typeface="Amiri" pitchFamily="2" charset="-78"/>
+                <a:ea typeface="Amiri" pitchFamily="2" charset="-78"/>
                 <a:cs typeface="Amiri" pitchFamily="2" charset="-78"/>
               </a:rPr>
               <a:t>أ</a:t>
@@ -9192,6 +9255,7 @@
                   <a:srgbClr val="1B3B6F"/>
                 </a:solidFill>
                 <a:latin typeface="Amiri" pitchFamily="2" charset="-78"/>
+                <a:ea typeface="Amiri" pitchFamily="2" charset="-78"/>
                 <a:cs typeface="Amiri" pitchFamily="2" charset="-78"/>
               </a:rPr>
               <a:t>أ</a:t>
@@ -9243,6 +9307,7 @@
                   <a:srgbClr val="8A6D1E"/>
                 </a:solidFill>
                 <a:latin typeface="Amiri" pitchFamily="2" charset="-78"/>
+                <a:ea typeface="Amiri" pitchFamily="2" charset="-78"/>
                 <a:cs typeface="Amiri" pitchFamily="2" charset="-78"/>
               </a:rPr>
               <a:t>نَمُوذَجُ الإِجَابَةِ</a:t>
@@ -9356,6 +9421,7 @@
                   <a:srgbClr val="1F2A37"/>
                 </a:solidFill>
                 <a:latin typeface="Amiri" pitchFamily="2" charset="-78"/>
+                <a:ea typeface="Amiri" pitchFamily="2" charset="-78"/>
                 <a:cs typeface="Amiri" pitchFamily="2" charset="-78"/>
               </a:rPr>
               <a:t>يَسْأَلُنِي الكِبَارُ دَائِمًا: "مَاذَا تُرِيدُ أَنْ تَكُونَ؟"، وَكَأَنَّ الجَوَابَ يَجِبُ أَنْ يَكُونَ كَلِمَةً وَاحِدَةً لَا تَتَغَيَّرُ أَبَدًا. أَمَّا أَنَا فَأَرَى المُسْتَقْبَلَ طَرِيقًا لَهُ مَحَطَّاتٌ، لَا بَابًا وَاحِدًا يُفْتَحُ مَرَّةً وَاحِدَةً.</a:t>
@@ -9375,6 +9441,7 @@
                   <a:srgbClr val="1F2A37"/>
                 </a:solidFill>
                 <a:latin typeface="Amiri" pitchFamily="2" charset="-78"/>
+                <a:ea typeface="Amiri" pitchFamily="2" charset="-78"/>
                 <a:cs typeface="Amiri" pitchFamily="2" charset="-78"/>
               </a:rPr>
               <a:t>مَحَطَّتِيَ الأُولَى وَاضِحَةٌ: سَأَدْرُسُ الرِّيَاضِيَّاتِ وَالحَاسُوبَ، لِأَنِّي أَطْمَحُ إِلَى أَنْ أَعْمَلَ فِي مَجَالِ الذَّكَاءِ الاصْطِنَاعِيِّ، وَبِالتَّحْدِيدِ فِي تَطْبِيقَاتٍ تُسَاعِدُ المَرْضَى عَلَى تَشْخِيصِ أَمْرَاضِهِمْ مُبَكِّرًا.</a:t>
@@ -9394,6 +9461,7 @@
                   <a:srgbClr val="1F2A37"/>
                 </a:solidFill>
                 <a:latin typeface="Amiri" pitchFamily="2" charset="-78"/>
+                <a:ea typeface="Amiri" pitchFamily="2" charset="-78"/>
                 <a:cs typeface="Amiri" pitchFamily="2" charset="-78"/>
               </a:rPr>
               <a:t>وَقَدْ وُلِدَ هٰذَا الحُلْمُ فِي لَحْظَةٍ حَزِينَةٍ؛ فَعِنْدَمَا مَرِضَ جَدِّي قَبْلَ ثَلَاثِ سَنَوَاتٍ، اكْتُشِفَ مَرَضُهُ مُتَأَخِّرًا، فَتَسَاءَلْتُ: أَلَمْ يَكُنْ بِإِمْكَانِ التِّكْنُولُوجْيَا أَنْ تَكْتَشِفَهُ قَبْلَ ذٰلِكَ؟ وَمُنْذُ ذٰلِكَ اليَوْمِ وَأَنَا أَقْرَأُ عَنِ الطِّبِّ الرَّقْمِيِّ، وَأُتَابِعُ أَحْدَثَ الأَبْحَاثِ فِيهِ.</a:t>
@@ -9413,6 +9481,7 @@
                   <a:srgbClr val="1F2A37"/>
                 </a:solidFill>
                 <a:latin typeface="Amiri" pitchFamily="2" charset="-78"/>
+                <a:ea typeface="Amiri" pitchFamily="2" charset="-78"/>
                 <a:cs typeface="Amiri" pitchFamily="2" charset="-78"/>
               </a:rPr>
               <a:t>صَحِيحٌ أَنَّ الطَّرِيقَ طَوِيلٌ وَالمُنَافَسَةَ شَدِيدَةٌ، غَيْرَ أَنَّ لِي خُطَّةً بَدِيلَةً؛ فَإِذَا لَمْ أُقْبَلْ فِي الجَامِعَةِ الَّتِي أُرِيدُهَا، فَسَأَبْدَأُ بِتَدْرِيبٍ مِهْنِيٍّ. وَلَوْ نَجَحَ تَطْبِيقٌ وَاحِدٌ صَمَّمْتُهُ فِي إِنْقَاذِ حَيَاةٍ وَاحِدَةٍ، لَشَعَرْتُ أَنَّ كُلَّ هٰذَا التَّعَبِ وَالسَّهَرِ كَانَ يَسْتَحِقُّ العَنَاءَ.</a:t>
@@ -9511,11 +9580,12 @@
               <a:buNone/>
             </a:pPr>
             <a:r>
-              <a:rPr lang="en-US" sz="950" b="1" dirty="0">
+              <a:rPr lang="ar-SA" sz="950" b="1" dirty="0">
                 <a:solidFill>
                   <a:srgbClr val="FFFFFF"/>
                 </a:solidFill>
                 <a:latin typeface="Calibri" pitchFamily="34" charset="0"/>
+                <a:ea typeface="Amiri" pitchFamily="2" charset="-78"/>
                 <a:cs typeface="Amiri" pitchFamily="2" charset="-78"/>
               </a:rPr>
               <a:t>وَكَأَنَّ الجَوَابَ</a:t>
@@ -9576,11 +9646,12 @@
               <a:buNone/>
             </a:pPr>
             <a:r>
-              <a:rPr lang="en-US" sz="950" b="1" dirty="0">
+              <a:rPr lang="ar-SA" sz="950" b="1" dirty="0">
                 <a:solidFill>
                   <a:srgbClr val="FFFFFF"/>
                 </a:solidFill>
                 <a:latin typeface="Calibri" pitchFamily="34" charset="0"/>
+                <a:ea typeface="Amiri" pitchFamily="2" charset="-78"/>
                 <a:cs typeface="Amiri" pitchFamily="2" charset="-78"/>
               </a:rPr>
               <a:t>أَطْمَحُ إِلَى أَنْ</a:t>
@@ -9641,11 +9712,12 @@
               <a:buNone/>
             </a:pPr>
             <a:r>
-              <a:rPr lang="en-US" sz="950" b="1" dirty="0">
+              <a:rPr lang="ar-SA" sz="950" b="1" dirty="0">
                 <a:solidFill>
                   <a:srgbClr val="FFFFFF"/>
                 </a:solidFill>
                 <a:latin typeface="Calibri" pitchFamily="34" charset="0"/>
+                <a:ea typeface="Amiri" pitchFamily="2" charset="-78"/>
                 <a:cs typeface="Amiri" pitchFamily="2" charset="-78"/>
               </a:rPr>
               <a:t>اكْتُشِفَ مَرَضُهُ</a:t>
@@ -9706,11 +9778,12 @@
               <a:buNone/>
             </a:pPr>
             <a:r>
-              <a:rPr lang="en-US" sz="950" b="1" dirty="0">
+              <a:rPr lang="ar-SA" sz="950" b="1" dirty="0">
                 <a:solidFill>
                   <a:srgbClr val="FFFFFF"/>
                 </a:solidFill>
                 <a:latin typeface="Calibri" pitchFamily="34" charset="0"/>
+                <a:ea typeface="Amiri" pitchFamily="2" charset="-78"/>
                 <a:cs typeface="Amiri" pitchFamily="2" charset="-78"/>
               </a:rPr>
               <a:t>لَوْ نَجَحَ … لَشَعَرْتُ</a:t>
@@ -9844,6 +9917,7 @@
                   <a:srgbClr val="D4AF37"/>
                 </a:solidFill>
                 <a:latin typeface="Amiri" pitchFamily="2" charset="-78"/>
+                <a:ea typeface="Amiri" pitchFamily="2" charset="-78"/>
                 <a:cs typeface="Amiri" pitchFamily="2" charset="-78"/>
               </a:rPr>
               <a:t>م</a:t>
@@ -10101,6 +10175,7 @@
                   <a:srgbClr val="8A6D1E"/>
                 </a:solidFill>
                 <a:latin typeface="Amiri" pitchFamily="2" charset="-78"/>
+                <a:ea typeface="Amiri" pitchFamily="2" charset="-78"/>
                 <a:cs typeface="Amiri" pitchFamily="2" charset="-78"/>
               </a:rPr>
               <a:t>ب</a:t>
@@ -10165,6 +10240,7 @@
                   <a:srgbClr val="1B3B6F"/>
                 </a:solidFill>
                 <a:latin typeface="Amiri" pitchFamily="2" charset="-78"/>
+                <a:ea typeface="Amiri" pitchFamily="2" charset="-78"/>
                 <a:cs typeface="Amiri" pitchFamily="2" charset="-78"/>
               </a:rPr>
               <a:t>ب</a:t>
@@ -10216,6 +10292,7 @@
                   <a:srgbClr val="8A6D1E"/>
                 </a:solidFill>
                 <a:latin typeface="Amiri" pitchFamily="2" charset="-78"/>
+                <a:ea typeface="Amiri" pitchFamily="2" charset="-78"/>
                 <a:cs typeface="Amiri" pitchFamily="2" charset="-78"/>
               </a:rPr>
               <a:t>نَمُوذَجُ الإِجَابَةِ</a:t>
@@ -10329,6 +10406,7 @@
                   <a:srgbClr val="1F2A37"/>
                 </a:solidFill>
                 <a:latin typeface="Amiri" pitchFamily="2" charset="-78"/>
+                <a:ea typeface="Amiri" pitchFamily="2" charset="-78"/>
                 <a:cs typeface="Amiri" pitchFamily="2" charset="-78"/>
               </a:rPr>
               <a:t>يُقَالُ لِلشَّبَابِ دَائِمًا: "اتَّبِعْ شَغَفَكَ"، لٰكِنَّ الوَاقِعَ أَكْثَرُ تَعْقِيدًا؛ فَالشَّغَفُ وَحْدَهُ لَا يَدْفَعُ الإِيجَارَ، وَالأَمَانُ وَحْدَهُ قَدْ يَجْعَلُ الحَيَاةَ مُمِلَّةً. فَكَيْفَ نَخْتَارُ؟</a:t>
@@ -10348,6 +10426,7 @@
                   <a:srgbClr val="1F2A37"/>
                 </a:solidFill>
                 <a:latin typeface="Amiri" pitchFamily="2" charset="-78"/>
+                <a:ea typeface="Amiri" pitchFamily="2" charset="-78"/>
                 <a:cs typeface="Amiri" pitchFamily="2" charset="-78"/>
               </a:rPr>
               <a:t>مِنْ نَاحِيَةٍ، يَعْمَلُ الإِنْسَانُ الشَّغُوفُ بِطَاقَةٍ أَكْبَرَ، وَيُبْدِعُ أَكْثَرَ، مِمَّا قَدْ يَقُودُهُ إِلَى النَّجَاحِ فِي مَجَالَاتٍ يَرَاهَا الآخَرُونَ صَعْبَةً. وَمِنْ نَاحِيَةٍ أُخْرَى، تُوَفِّرُ المِهَنُ المَضْمُونَةُ، كَالمُحَاسَبَةِ وَالتَّمْرِيضِ، دَخْلًا ثَابِتًا يَسْمَحُ بِبِنَاءِ أُسْرَةٍ وَحَيَاةٍ مُسْتَقِرَّةٍ.</a:t>
@@ -10367,6 +10446,7 @@
                   <a:srgbClr val="1F2A37"/>
                 </a:solidFill>
                 <a:latin typeface="Amiri" pitchFamily="2" charset="-78"/>
+                <a:ea typeface="Amiri" pitchFamily="2" charset="-78"/>
                 <a:cs typeface="Amiri" pitchFamily="2" charset="-78"/>
               </a:rPr>
               <a:t>وَقَدْ رَأَيْتُ حَلًّا ذَكِيًّا فِي تَجْرِبَةِ عَمِّي؛ فَقَدْ دَرَسَ المُحَاسَبَةَ وَعَمِلَ بِهَا عَشْرَ سَنَوَاتٍ، بَيْنَمَا كَانَ يَرْسُمُ فِي المَسَاءِ. وَعِنْدَمَا أَصْبَحَتْ لَوْحَاتُهُ تُبَاعُ، تَرَكَ عَمَلَهُ، وَافْتَتَحَ مَعْرِضَهُ الخَاصَّ، دُونَ أَنْ يُخَاطِرَ بِمُسْتَقْبَلِ أُسْرَتِهِ، وَهُوَ اليَوْمَ أَسْعَدُ مِنْ أَيِّ وَقْتٍ مَضَى.</a:t>
@@ -10386,6 +10466,7 @@
                   <a:srgbClr val="1F2A37"/>
                 </a:solidFill>
                 <a:latin typeface="Amiri" pitchFamily="2" charset="-78"/>
+                <a:ea typeface="Amiri" pitchFamily="2" charset="-78"/>
                 <a:cs typeface="Amiri" pitchFamily="2" charset="-78"/>
               </a:rPr>
               <a:t>صَحِيحٌ أَنَّ الاخْتِيَارَ صَعْبٌ، غَيْرَ أَنَّهُ لَيْسَ بِالضَّرُورَةِ إِمَّا هٰذَا أَوْ ذَاكَ. وَإِذَا جَمَعَ الشَّبَابُ بَيْنَ مِهْنَةٍ تُؤَمِّنُ حَيَاتَهُمْ وَشَغَفٍ يُغَذِّي أَرْوَاحَهُمْ، فَسَيَصِلُونَ إِلَى التَّوَازُنِ الَّذِي يَبْحَثُ عَنْهُ الجَمِيعُ، وَلَنْ يَضْطَرُّوا إِلَى الاخْتِيَارِ بَيْنَ الخُبْزِ وَالحُلْمِ.</a:t>
@@ -10484,11 +10565,12 @@
               <a:buNone/>
             </a:pPr>
             <a:r>
-              <a:rPr lang="en-US" sz="950" b="1" dirty="0">
+              <a:rPr lang="ar-SA" sz="950" b="1" dirty="0">
                 <a:solidFill>
                   <a:srgbClr val="FFFFFF"/>
                 </a:solidFill>
                 <a:latin typeface="Calibri" pitchFamily="34" charset="0"/>
+                <a:ea typeface="Amiri" pitchFamily="2" charset="-78"/>
                 <a:cs typeface="Amiri" pitchFamily="2" charset="-78"/>
               </a:rPr>
               <a:t>يُقَالُ لِلشَّبَابِ</a:t>
@@ -10549,11 +10631,12 @@
               <a:buNone/>
             </a:pPr>
             <a:r>
-              <a:rPr lang="en-US" sz="950" b="1" dirty="0">
+              <a:rPr lang="ar-SA" sz="950" b="1" dirty="0">
                 <a:solidFill>
                   <a:srgbClr val="FFFFFF"/>
                 </a:solidFill>
                 <a:latin typeface="Calibri" pitchFamily="34" charset="0"/>
+                <a:ea typeface="Amiri" pitchFamily="2" charset="-78"/>
                 <a:cs typeface="Amiri" pitchFamily="2" charset="-78"/>
               </a:rPr>
               <a:t>مِمَّا قَدْ يَقُودُهُ</a:t>
@@ -10614,11 +10697,12 @@
               <a:buNone/>
             </a:pPr>
             <a:r>
-              <a:rPr lang="en-US" sz="950" b="1" dirty="0">
+              <a:rPr lang="ar-SA" sz="950" b="1" dirty="0">
                 <a:solidFill>
                   <a:srgbClr val="FFFFFF"/>
                 </a:solidFill>
                 <a:latin typeface="Calibri" pitchFamily="34" charset="0"/>
+                <a:ea typeface="Amiri" pitchFamily="2" charset="-78"/>
                 <a:cs typeface="Amiri" pitchFamily="2" charset="-78"/>
               </a:rPr>
               <a:t>بَيْنَمَا كَانَ يَرْسُمُ</a:t>
@@ -10679,11 +10763,12 @@
               <a:buNone/>
             </a:pPr>
             <a:r>
-              <a:rPr lang="en-US" sz="950" b="1" dirty="0">
+              <a:rPr lang="ar-SA" sz="950" b="1" dirty="0">
                 <a:solidFill>
                   <a:srgbClr val="FFFFFF"/>
                 </a:solidFill>
                 <a:latin typeface="Calibri" pitchFamily="34" charset="0"/>
+                <a:ea typeface="Amiri" pitchFamily="2" charset="-78"/>
                 <a:cs typeface="Amiri" pitchFamily="2" charset="-78"/>
               </a:rPr>
               <a:t>إِذَا جَمَعَ … فَسَيَصِلُونَ</a:t>
@@ -10817,6 +10902,7 @@
                   <a:srgbClr val="D4AF37"/>
                 </a:solidFill>
                 <a:latin typeface="Amiri" pitchFamily="2" charset="-78"/>
+                <a:ea typeface="Amiri" pitchFamily="2" charset="-78"/>
                 <a:cs typeface="Amiri" pitchFamily="2" charset="-78"/>
               </a:rPr>
               <a:t>م</a:t>
@@ -11137,6 +11223,7 @@
                   <a:srgbClr val="8A6D1E"/>
                 </a:solidFill>
                 <a:latin typeface="Amiri" pitchFamily="2" charset="-78"/>
+                <a:ea typeface="Amiri" pitchFamily="2" charset="-78"/>
                 <a:cs typeface="Amiri" pitchFamily="2" charset="-78"/>
               </a:rPr>
               <a:t>قَيِّمْ عَمَلَكَ</a:t>
@@ -12381,6 +12468,7 @@
                   <a:srgbClr val="FFFFFF"/>
                 </a:solidFill>
                 <a:latin typeface="Amiri" pitchFamily="2" charset="-78"/>
+                <a:ea typeface="Amiri" pitchFamily="2" charset="-78"/>
                 <a:cs typeface="Amiri" pitchFamily="2" charset="-78"/>
               </a:rPr>
               <a:t>أَحْسَنْتُمْ! إِلَى اللِّقَاءِ</a:t>
@@ -12533,6 +12621,7 @@
                   <a:srgbClr val="D4AF37"/>
                 </a:solidFill>
                 <a:latin typeface="Amiri" pitchFamily="2" charset="-78"/>
+                <a:ea typeface="Amiri" pitchFamily="2" charset="-78"/>
                 <a:cs typeface="Amiri" pitchFamily="2" charset="-78"/>
               </a:rPr>
               <a:t>وَرْشَةُ التَّدْرِيبِ</a:t>
@@ -12666,6 +12755,7 @@
                   <a:srgbClr val="D4AF37"/>
                 </a:solidFill>
                 <a:latin typeface="Amiri" pitchFamily="2" charset="-78"/>
+                <a:ea typeface="Amiri" pitchFamily="2" charset="-78"/>
                 <a:cs typeface="Amiri" pitchFamily="2" charset="-78"/>
               </a:rPr>
               <a:t>م</a:t>
@@ -12986,6 +13076,7 @@
                   <a:srgbClr val="8A6D1E"/>
                 </a:solidFill>
                 <a:latin typeface="Amiri" pitchFamily="2" charset="-78"/>
+                <a:ea typeface="Amiri" pitchFamily="2" charset="-78"/>
                 <a:cs typeface="Amiri" pitchFamily="2" charset="-78"/>
               </a:rPr>
               <a:t>آدَابُ الصَّفِّ</a:t>
@@ -14517,6 +14608,7 @@
                   <a:srgbClr val="D4AF37"/>
                 </a:solidFill>
                 <a:latin typeface="Amiri" pitchFamily="2" charset="-78"/>
+                <a:ea typeface="Amiri" pitchFamily="2" charset="-78"/>
                 <a:cs typeface="Amiri" pitchFamily="2" charset="-78"/>
               </a:rPr>
               <a:t>م</a:t>
@@ -14837,6 +14929,7 @@
                   <a:srgbClr val="8A6D1E"/>
                 </a:solidFill>
                 <a:latin typeface="Amiri" pitchFamily="2" charset="-78"/>
+                <a:ea typeface="Amiri" pitchFamily="2" charset="-78"/>
                 <a:cs typeface="Amiri" pitchFamily="2" charset="-78"/>
               </a:rPr>
               <a:t>خَرِيطَةُ الوَرْشَةِ</a:t>
@@ -15151,6 +15244,7 @@
                   <a:srgbClr val="1B3B6F"/>
                 </a:solidFill>
                 <a:latin typeface="Amiri" pitchFamily="2" charset="-78"/>
+                <a:ea typeface="Amiri" pitchFamily="2" charset="-78"/>
                 <a:cs typeface="Amiri" pitchFamily="2" charset="-78"/>
               </a:rPr>
               <a:t>كَيْفَ</a:t>
@@ -15427,6 +15521,7 @@
                   <a:srgbClr val="1E6B52"/>
                 </a:solidFill>
                 <a:latin typeface="Amiri" pitchFamily="2" charset="-78"/>
+                <a:ea typeface="Amiri" pitchFamily="2" charset="-78"/>
                 <a:cs typeface="Amiri" pitchFamily="2" charset="-78"/>
               </a:rPr>
               <a:t>الاسْتِمَارَةُ</a:t>
@@ -15703,6 +15798,7 @@
                   <a:srgbClr val="1E6B52"/>
                 </a:solidFill>
                 <a:latin typeface="Amiri" pitchFamily="2" charset="-78"/>
+                <a:ea typeface="Amiri" pitchFamily="2" charset="-78"/>
                 <a:cs typeface="Amiri" pitchFamily="2" charset="-78"/>
               </a:rPr>
               <a:t>الرِّسَالَةُ</a:t>
@@ -15979,6 +16075,7 @@
                   <a:srgbClr val="1E6B52"/>
                 </a:solidFill>
                 <a:latin typeface="Amiri" pitchFamily="2" charset="-78"/>
+                <a:ea typeface="Amiri" pitchFamily="2" charset="-78"/>
                 <a:cs typeface="Amiri" pitchFamily="2" charset="-78"/>
               </a:rPr>
               <a:t>المَقَالُ</a:t>
@@ -16255,6 +16352,7 @@
                   <a:srgbClr val="8A6D1E"/>
                 </a:solidFill>
                 <a:latin typeface="Amiri" pitchFamily="2" charset="-78"/>
+                <a:ea typeface="Amiri" pitchFamily="2" charset="-78"/>
                 <a:cs typeface="Amiri" pitchFamily="2" charset="-78"/>
               </a:rPr>
               <a:t>قَيِّمْ</a:t>
@@ -16498,6 +16596,7 @@
                   <a:srgbClr val="D4AF37"/>
                 </a:solidFill>
                 <a:latin typeface="Amiri" pitchFamily="2" charset="-78"/>
+                <a:ea typeface="Amiri" pitchFamily="2" charset="-78"/>
                 <a:cs typeface="Amiri" pitchFamily="2" charset="-78"/>
               </a:rPr>
               <a:t>م</a:t>
@@ -16818,6 +16917,7 @@
                   <a:srgbClr val="8A6D1E"/>
                 </a:solidFill>
                 <a:latin typeface="Amiri" pitchFamily="2" charset="-78"/>
+                <a:ea typeface="Amiri" pitchFamily="2" charset="-78"/>
                 <a:cs typeface="Amiri" pitchFamily="2" charset="-78"/>
               </a:rPr>
               <a:t>امْتِحَانُ الكِتَابَةِ</a:t>
@@ -17442,6 +17542,7 @@
                   <a:srgbClr val="1B3B6F"/>
                 </a:solidFill>
                 <a:latin typeface="Amiri" pitchFamily="2" charset="-78"/>
+                <a:ea typeface="Amiri" pitchFamily="2" charset="-78"/>
                 <a:cs typeface="Amiri" pitchFamily="2" charset="-78"/>
               </a:rPr>
               <a:t>أَطْمَحُ إِلَى أَنْ أُصْبِحَ طَبِيبَةَ أَطْفَالٍ</a:t>
@@ -17541,6 +17642,7 @@
                   <a:srgbClr val="1B3B6F"/>
                 </a:solidFill>
                 <a:latin typeface="Amiri" pitchFamily="2" charset="-78"/>
+                <a:ea typeface="Amiri" pitchFamily="2" charset="-78"/>
                 <a:cs typeface="Amiri" pitchFamily="2" charset="-78"/>
               </a:rPr>
               <a:t>إِذَا لَمْ أُقْبَلْ، فَسَأَدْرُسُ التَّمْرِيضَ</a:t>
@@ -17640,6 +17742,7 @@
                   <a:srgbClr val="1B3B6F"/>
                 </a:solidFill>
                 <a:latin typeface="Amiri" pitchFamily="2" charset="-78"/>
+                <a:ea typeface="Amiri" pitchFamily="2" charset="-78"/>
                 <a:cs typeface="Amiri" pitchFamily="2" charset="-78"/>
               </a:rPr>
               <a:t>لَنْ أَتْرُكَ حُلْمِي أَبَدًا</a:t>
@@ -17811,6 +17914,7 @@
                   <a:srgbClr val="D4AF37"/>
                 </a:solidFill>
                 <a:latin typeface="Amiri" pitchFamily="2" charset="-78"/>
+                <a:ea typeface="Amiri" pitchFamily="2" charset="-78"/>
                 <a:cs typeface="Amiri" pitchFamily="2" charset="-78"/>
               </a:rPr>
               <a:t>م</a:t>
@@ -18131,6 +18235,7 @@
                   <a:srgbClr val="8A6D1E"/>
                 </a:solidFill>
                 <a:latin typeface="Amiri" pitchFamily="2" charset="-78"/>
+                <a:ea typeface="Amiri" pitchFamily="2" charset="-78"/>
                 <a:cs typeface="Amiri" pitchFamily="2" charset="-78"/>
               </a:rPr>
               <a:t>اسْتِمَارَةُ مُقَابَلَةِ الإِرْشَادِ المِهْنِيِّ</a:t>
@@ -18487,6 +18592,7 @@
                   <a:srgbClr val="1B3B6F"/>
                 </a:solidFill>
                 <a:latin typeface="Amiri" pitchFamily="2" charset="-78"/>
+                <a:ea typeface="Amiri" pitchFamily="2" charset="-78"/>
                 <a:cs typeface="Amiri" pitchFamily="2" charset="-78"/>
               </a:rPr>
               <a:t>الاسْمُ وَالصَّفُّ</a:t>
@@ -18731,6 +18837,7 @@
                   <a:srgbClr val="1B3B6F"/>
                 </a:solidFill>
                 <a:latin typeface="Amiri" pitchFamily="2" charset="-78"/>
+                <a:ea typeface="Amiri" pitchFamily="2" charset="-78"/>
                 <a:cs typeface="Amiri" pitchFamily="2" charset="-78"/>
               </a:rPr>
               <a:t>المَوَادُّ لِلسَّنَةِ القَادِمَةِ</a:t>
@@ -18975,6 +19082,7 @@
                   <a:srgbClr val="1B3B6F"/>
                 </a:solidFill>
                 <a:latin typeface="Amiri" pitchFamily="2" charset="-78"/>
+                <a:ea typeface="Amiri" pitchFamily="2" charset="-78"/>
                 <a:cs typeface="Amiri" pitchFamily="2" charset="-78"/>
               </a:rPr>
               <a:t>المِهْنَةُ الَّتِي تَحْلُمُ بِهَا</a:t>
@@ -19219,6 +19327,7 @@
                   <a:srgbClr val="1B3B6F"/>
                 </a:solidFill>
                 <a:latin typeface="Amiri" pitchFamily="2" charset="-78"/>
+                <a:ea typeface="Amiri" pitchFamily="2" charset="-78"/>
                 <a:cs typeface="Amiri" pitchFamily="2" charset="-78"/>
               </a:rPr>
               <a:t>الجَامِعَةُ المُفَضَّلَةُ</a:t>
@@ -19463,6 +19572,7 @@
                   <a:srgbClr val="1B3B6F"/>
                 </a:solidFill>
                 <a:latin typeface="Amiri" pitchFamily="2" charset="-78"/>
+                <a:ea typeface="Amiri" pitchFamily="2" charset="-78"/>
                 <a:cs typeface="Amiri" pitchFamily="2" charset="-78"/>
               </a:rPr>
               <a:t>مَهَارَةٌ عِنْدَكَ</a:t>
@@ -19707,6 +19817,7 @@
                   <a:srgbClr val="1B3B6F"/>
                 </a:solidFill>
                 <a:latin typeface="Amiri" pitchFamily="2" charset="-78"/>
+                <a:ea typeface="Amiri" pitchFamily="2" charset="-78"/>
                 <a:cs typeface="Amiri" pitchFamily="2" charset="-78"/>
               </a:rPr>
               <a:t>خِبْرَةُ عَمَلٍ</a:t>
@@ -19951,6 +20062,7 @@
                   <a:srgbClr val="1B3B6F"/>
                 </a:solidFill>
                 <a:latin typeface="Amiri" pitchFamily="2" charset="-78"/>
+                <a:ea typeface="Amiri" pitchFamily="2" charset="-78"/>
                 <a:cs typeface="Amiri" pitchFamily="2" charset="-78"/>
               </a:rPr>
               <a:t>الخُطَّةُ البَدِيلَةُ</a:t>
@@ -20130,6 +20242,7 @@
                   <a:srgbClr val="1B3B6F"/>
                 </a:solidFill>
                 <a:latin typeface="Amiri" pitchFamily="2" charset="-78"/>
+                <a:ea typeface="Amiri" pitchFamily="2" charset="-78"/>
                 <a:cs typeface="Amiri" pitchFamily="2" charset="-78"/>
               </a:rPr>
               <a:t>جُمْلَةٌ: مَا هَدَفُكَ بَعْدَ عَشْرِ سَنَوَاتٍ؟</a:t>
@@ -20339,6 +20452,7 @@
                   <a:srgbClr val="D4AF37"/>
                 </a:solidFill>
                 <a:latin typeface="Amiri" pitchFamily="2" charset="-78"/>
+                <a:ea typeface="Amiri" pitchFamily="2" charset="-78"/>
                 <a:cs typeface="Amiri" pitchFamily="2" charset="-78"/>
               </a:rPr>
               <a:t>م</a:t>
@@ -20659,6 +20773,7 @@
                   <a:srgbClr val="8A6D1E"/>
                 </a:solidFill>
                 <a:latin typeface="Amiri" pitchFamily="2" charset="-78"/>
+                <a:ea typeface="Amiri" pitchFamily="2" charset="-78"/>
                 <a:cs typeface="Amiri" pitchFamily="2" charset="-78"/>
               </a:rPr>
               <a:t>نَمُوذَجُ الإِجَابَةِ</a:t>
@@ -20977,6 +21092,7 @@
                   <a:srgbClr val="1B3B6F"/>
                 </a:solidFill>
                 <a:latin typeface="Amiri" pitchFamily="2" charset="-78"/>
+                <a:ea typeface="Amiri" pitchFamily="2" charset="-78"/>
                 <a:cs typeface="Amiri" pitchFamily="2" charset="-78"/>
               </a:rPr>
               <a:t>سَلْمَى عُمَرُ، الحَادِي عَشَرَ</a:t>
@@ -21015,6 +21131,7 @@
                   <a:srgbClr val="1B3B6F"/>
                 </a:solidFill>
                 <a:latin typeface="Amiri" pitchFamily="2" charset="-78"/>
+                <a:ea typeface="Amiri" pitchFamily="2" charset="-78"/>
                 <a:cs typeface="Amiri" pitchFamily="2" charset="-78"/>
               </a:rPr>
               <a:t>الاسْمُ وَالصَّفُّ</a:t>
@@ -21156,6 +21273,7 @@
                   <a:srgbClr val="1B3B6F"/>
                 </a:solidFill>
                 <a:latin typeface="Amiri" pitchFamily="2" charset="-78"/>
+                <a:ea typeface="Amiri" pitchFamily="2" charset="-78"/>
                 <a:cs typeface="Amiri" pitchFamily="2" charset="-78"/>
               </a:rPr>
               <a:t>الأَحْيَاءُ وَالكِيمْيَاءُ وَالرِّيَاضِيَّاتُ</a:t>
@@ -21194,6 +21312,7 @@
                   <a:srgbClr val="1B3B6F"/>
                 </a:solidFill>
                 <a:latin typeface="Amiri" pitchFamily="2" charset="-78"/>
+                <a:ea typeface="Amiri" pitchFamily="2" charset="-78"/>
                 <a:cs typeface="Amiri" pitchFamily="2" charset="-78"/>
               </a:rPr>
               <a:t>المَوَادُّ لِلسَّنَةِ القَادِمَةِ</a:t>
@@ -21335,6 +21454,7 @@
                   <a:srgbClr val="1B3B6F"/>
                 </a:solidFill>
                 <a:latin typeface="Amiri" pitchFamily="2" charset="-78"/>
+                <a:ea typeface="Amiri" pitchFamily="2" charset="-78"/>
                 <a:cs typeface="Amiri" pitchFamily="2" charset="-78"/>
               </a:rPr>
               <a:t>طَبِيبَةُ أَطْفَالٍ</a:t>
@@ -21373,6 +21493,7 @@
                   <a:srgbClr val="1B3B6F"/>
                 </a:solidFill>
                 <a:latin typeface="Amiri" pitchFamily="2" charset="-78"/>
+                <a:ea typeface="Amiri" pitchFamily="2" charset="-78"/>
                 <a:cs typeface="Amiri" pitchFamily="2" charset="-78"/>
               </a:rPr>
               <a:t>المِهْنَةُ الَّتِي تَحْلُمُ بِهَا</a:t>
@@ -21514,6 +21635,7 @@
                   <a:srgbClr val="1B3B6F"/>
                 </a:solidFill>
                 <a:latin typeface="Amiri" pitchFamily="2" charset="-78"/>
+                <a:ea typeface="Amiri" pitchFamily="2" charset="-78"/>
                 <a:cs typeface="Amiri" pitchFamily="2" charset="-78"/>
               </a:rPr>
               <a:t>جَامِعَةُ بِرْمِنْغْهَامَ</a:t>
@@ -21552,6 +21674,7 @@
                   <a:srgbClr val="1B3B6F"/>
                 </a:solidFill>
                 <a:latin typeface="Amiri" pitchFamily="2" charset="-78"/>
+                <a:ea typeface="Amiri" pitchFamily="2" charset="-78"/>
                 <a:cs typeface="Amiri" pitchFamily="2" charset="-78"/>
               </a:rPr>
               <a:t>الجَامِعَةُ المُفَضَّلَةُ</a:t>
@@ -21693,6 +21816,7 @@
                   <a:srgbClr val="1B3B6F"/>
                 </a:solidFill>
                 <a:latin typeface="Amiri" pitchFamily="2" charset="-78"/>
+                <a:ea typeface="Amiri" pitchFamily="2" charset="-78"/>
                 <a:cs typeface="Amiri" pitchFamily="2" charset="-78"/>
               </a:rPr>
               <a:t>الصَّبْرُ</a:t>
@@ -21731,6 +21855,7 @@
                   <a:srgbClr val="1B3B6F"/>
                 </a:solidFill>
                 <a:latin typeface="Amiri" pitchFamily="2" charset="-78"/>
+                <a:ea typeface="Amiri" pitchFamily="2" charset="-78"/>
                 <a:cs typeface="Amiri" pitchFamily="2" charset="-78"/>
               </a:rPr>
               <a:t>مَهَارَةٌ عِنْدَكَ</a:t>
@@ -21872,6 +21997,7 @@
                   <a:srgbClr val="1B3B6F"/>
                 </a:solidFill>
                 <a:latin typeface="Amiri" pitchFamily="2" charset="-78"/>
+                <a:ea typeface="Amiri" pitchFamily="2" charset="-78"/>
                 <a:cs typeface="Amiri" pitchFamily="2" charset="-78"/>
               </a:rPr>
               <a:t>أُسْبُوعٌ فِي مُسْتَشْفًى</a:t>
@@ -21910,6 +22036,7 @@
                   <a:srgbClr val="1B3B6F"/>
                 </a:solidFill>
                 <a:latin typeface="Amiri" pitchFamily="2" charset="-78"/>
+                <a:ea typeface="Amiri" pitchFamily="2" charset="-78"/>
                 <a:cs typeface="Amiri" pitchFamily="2" charset="-78"/>
               </a:rPr>
               <a:t>خِبْرَةُ عَمَلٍ</a:t>
@@ -22051,6 +22178,7 @@
                   <a:srgbClr val="1B3B6F"/>
                 </a:solidFill>
                 <a:latin typeface="Amiri" pitchFamily="2" charset="-78"/>
+                <a:ea typeface="Amiri" pitchFamily="2" charset="-78"/>
                 <a:cs typeface="Amiri" pitchFamily="2" charset="-78"/>
               </a:rPr>
               <a:t>دِرَاسَةُ التَّمْرِيضِ</a:t>
@@ -22089,6 +22217,7 @@
                   <a:srgbClr val="1B3B6F"/>
                 </a:solidFill>
                 <a:latin typeface="Amiri" pitchFamily="2" charset="-78"/>
+                <a:ea typeface="Amiri" pitchFamily="2" charset="-78"/>
                 <a:cs typeface="Amiri" pitchFamily="2" charset="-78"/>
               </a:rPr>
               <a:t>الخُطَّةُ البَدِيلَةُ</a:t>
@@ -22230,6 +22359,7 @@
                   <a:srgbClr val="1B3B6F"/>
                 </a:solidFill>
                 <a:latin typeface="Amiri" pitchFamily="2" charset="-78"/>
+                <a:ea typeface="Amiri" pitchFamily="2" charset="-78"/>
                 <a:cs typeface="Amiri" pitchFamily="2" charset="-78"/>
               </a:rPr>
               <a:t>أَطْمَحُ إِلَى أَنْ أَعْمَلَ طَبِيبَةً فِي مُنَظَّمَةٍ تُسَاعِدُ الأَطْفَالَ فِي البُلْدَانِ الفَقِيرَةِ.</a:t>
@@ -22268,6 +22398,7 @@
                   <a:srgbClr val="1B3B6F"/>
                 </a:solidFill>
                 <a:latin typeface="Amiri" pitchFamily="2" charset="-78"/>
+                <a:ea typeface="Amiri" pitchFamily="2" charset="-78"/>
                 <a:cs typeface="Amiri" pitchFamily="2" charset="-78"/>
               </a:rPr>
               <a:t>جُمْلَةٌ: مَا هَدَفُكَ بَعْدَ عَشْرِ سَنَوَاتٍ؟</a:t>
@@ -22477,6 +22608,7 @@
                   <a:srgbClr val="D4AF37"/>
                 </a:solidFill>
                 <a:latin typeface="Amiri" pitchFamily="2" charset="-78"/>
+                <a:ea typeface="Amiri" pitchFamily="2" charset="-78"/>
                 <a:cs typeface="Amiri" pitchFamily="2" charset="-78"/>
               </a:rPr>
               <a:t>م</a:t>
@@ -22797,6 +22929,7 @@
                   <a:srgbClr val="8A6D1E"/>
                 </a:solidFill>
                 <a:latin typeface="Amiri" pitchFamily="2" charset="-78"/>
+                <a:ea typeface="Amiri" pitchFamily="2" charset="-78"/>
                 <a:cs typeface="Amiri" pitchFamily="2" charset="-78"/>
               </a:rPr>
               <a:t>خِطَطِي لِلْمُسْتَقْبَلِ</a:t>
@@ -23272,6 +23405,7 @@
                   <a:srgbClr val="1B3B6F"/>
                 </a:solidFill>
                 <a:latin typeface="Amiri" pitchFamily="2" charset="-78"/>
+                <a:ea typeface="Amiri" pitchFamily="2" charset="-78"/>
                 <a:cs typeface="Amiri" pitchFamily="2" charset="-78"/>
               </a:rPr>
               <a:t>بَعْدَ الامْتِحَانَاتِ سَأَدْرُسُ …</a:t>
@@ -23348,6 +23482,7 @@
                   <a:srgbClr val="1B3B6F"/>
                 </a:solidFill>
                 <a:latin typeface="Amiri" pitchFamily="2" charset="-78"/>
+                <a:ea typeface="Amiri" pitchFamily="2" charset="-78"/>
                 <a:cs typeface="Amiri" pitchFamily="2" charset="-78"/>
               </a:rPr>
               <a:t>أَتَمَنَّى أَنْ أُصْبِحَ … لِأَنِّي …</a:t>
@@ -23424,6 +23559,7 @@
                   <a:srgbClr val="1B3B6F"/>
                 </a:solidFill>
                 <a:latin typeface="Amiri" pitchFamily="2" charset="-78"/>
+                <a:ea typeface="Amiri" pitchFamily="2" charset="-78"/>
                 <a:cs typeface="Amiri" pitchFamily="2" charset="-78"/>
               </a:rPr>
               <a:t>فِي الشَّهْرِ المَاضِي زُرْتُ … فَأَعْجَبَنِي …</a:t>
@@ -23500,6 +23636,7 @@
                   <a:srgbClr val="1B3B6F"/>
                 </a:solidFill>
                 <a:latin typeface="Amiri" pitchFamily="2" charset="-78"/>
+                <a:ea typeface="Amiri" pitchFamily="2" charset="-78"/>
                 <a:cs typeface="Amiri" pitchFamily="2" charset="-78"/>
               </a:rPr>
               <a:t>إِذَا لَمْ أُقْبَلْ، فَسَأَدْرُسُ …</a:t>
@@ -23671,6 +23808,7 @@
                   <a:srgbClr val="D4AF37"/>
                 </a:solidFill>
                 <a:latin typeface="Amiri" pitchFamily="2" charset="-78"/>
+                <a:ea typeface="Amiri" pitchFamily="2" charset="-78"/>
                 <a:cs typeface="Amiri" pitchFamily="2" charset="-78"/>
               </a:rPr>
               <a:t>م</a:t>
@@ -23991,6 +24129,7 @@
                   <a:srgbClr val="8A6D1E"/>
                 </a:solidFill>
                 <a:latin typeface="Amiri" pitchFamily="2" charset="-78"/>
+                <a:ea typeface="Amiri" pitchFamily="2" charset="-78"/>
                 <a:cs typeface="Amiri" pitchFamily="2" charset="-78"/>
               </a:rPr>
               <a:t>نَصُّ السُّؤَالِ</a:t>
@@ -24271,6 +24410,7 @@
                   <a:srgbClr val="1B3B6F"/>
                 </a:solidFill>
                 <a:latin typeface="Amiri" pitchFamily="2" charset="-78"/>
+                <a:ea typeface="Amiri" pitchFamily="2" charset="-78"/>
                 <a:cs typeface="Amiri" pitchFamily="2" charset="-78"/>
               </a:rPr>
               <a:t>اكْتُبِي رِسَالَةً إِلَى أَحَدِ أَقَارِبِكِ عَنْ خِطَطِكِ لِلْمُسْتَقْبَلِ (٨٠–٩٠ كَلِمَةً).</a:t>
@@ -24412,6 +24552,7 @@
                   <a:srgbClr val="1B3B6F"/>
                 </a:solidFill>
                 <a:latin typeface="Amiri" pitchFamily="2" charset="-78"/>
+                <a:ea typeface="Amiri" pitchFamily="2" charset="-78"/>
                 <a:cs typeface="Amiri" pitchFamily="2" charset="-78"/>
               </a:rPr>
               <a:t>مَاذَا سَتَدْرُسِينَ بَعْدَ ذٰلِكَ؟</a:t>
@@ -24553,6 +24694,7 @@
                   <a:srgbClr val="1B3B6F"/>
                 </a:solidFill>
                 <a:latin typeface="Amiri" pitchFamily="2" charset="-78"/>
+                <a:ea typeface="Amiri" pitchFamily="2" charset="-78"/>
                 <a:cs typeface="Amiri" pitchFamily="2" charset="-78"/>
               </a:rPr>
               <a:t>مَا الوَظِيفَةُ الَّتِي تَحْلُمِينَ بِهَا؟ وَلِمَاذَا؟</a:t>
@@ -24694,6 +24836,7 @@
                   <a:srgbClr val="1B3B6F"/>
                 </a:solidFill>
                 <a:latin typeface="Amiri" pitchFamily="2" charset="-78"/>
+                <a:ea typeface="Amiri" pitchFamily="2" charset="-78"/>
                 <a:cs typeface="Amiri" pitchFamily="2" charset="-78"/>
               </a:rPr>
               <a:t>مَا التَّجْرِبَةُ الَّتِي أَثَّرَتْ فِي اخْتِيَارِكِ؟</a:t>
@@ -24835,6 +24978,7 @@
                   <a:srgbClr val="1B3B6F"/>
                 </a:solidFill>
                 <a:latin typeface="Amiri" pitchFamily="2" charset="-78"/>
+                <a:ea typeface="Amiri" pitchFamily="2" charset="-78"/>
                 <a:cs typeface="Amiri" pitchFamily="2" charset="-78"/>
               </a:rPr>
               <a:t>مَا خُطَّتُكِ البَدِيلَةُ؟ وَاطْلُبِي مُسَاعَدَةً.</a:t>
@@ -25044,6 +25188,7 @@
                   <a:srgbClr val="D4AF37"/>
                 </a:solidFill>
                 <a:latin typeface="Amiri" pitchFamily="2" charset="-78"/>
+                <a:ea typeface="Amiri" pitchFamily="2" charset="-78"/>
                 <a:cs typeface="Amiri" pitchFamily="2" charset="-78"/>
               </a:rPr>
               <a:t>م</a:t>
@@ -25364,6 +25509,7 @@
                   <a:srgbClr val="8A6D1E"/>
                 </a:solidFill>
                 <a:latin typeface="Amiri" pitchFamily="2" charset="-78"/>
+                <a:ea typeface="Amiri" pitchFamily="2" charset="-78"/>
                 <a:cs typeface="Amiri" pitchFamily="2" charset="-78"/>
               </a:rPr>
               <a:t>قَوَالِبُ الكِتَابَةِ</a:t>
@@ -25644,6 +25790,7 @@
                   <a:srgbClr val="1B3B6F"/>
                 </a:solidFill>
                 <a:latin typeface="Amiri" pitchFamily="2" charset="-78"/>
+                <a:ea typeface="Amiri" pitchFamily="2" charset="-78"/>
                 <a:cs typeface="Amiri" pitchFamily="2" charset="-78"/>
               </a:rPr>
               <a:t>مَرْحَبًا يَا ______ ، كَيْفَ حَالُكِ؟</a:t>
@@ -25850,6 +25997,7 @@
                   <a:srgbClr val="1B3B6F"/>
                 </a:solidFill>
                 <a:latin typeface="Amiri" pitchFamily="2" charset="-78"/>
+                <a:ea typeface="Amiri" pitchFamily="2" charset="-78"/>
                 <a:cs typeface="Amiri" pitchFamily="2" charset="-78"/>
               </a:rPr>
               <a:t>بَعْدَ الامْتِحَانَاتِ سَأَدْرُسُ ______ .</a:t>
@@ -26056,6 +26204,7 @@
                   <a:srgbClr val="1B3B6F"/>
                 </a:solidFill>
                 <a:latin typeface="Amiri" pitchFamily="2" charset="-78"/>
+                <a:ea typeface="Amiri" pitchFamily="2" charset="-78"/>
                 <a:cs typeface="Amiri" pitchFamily="2" charset="-78"/>
               </a:rPr>
               <a:t>أَتَمَنَّى أَنْ أُصْبِحَ ______ ، لِأَنِّي ______ .</a:t>
@@ -26262,6 +26411,7 @@
                   <a:srgbClr val="1B3B6F"/>
                 </a:solidFill>
                 <a:latin typeface="Amiri" pitchFamily="2" charset="-78"/>
+                <a:ea typeface="Amiri" pitchFamily="2" charset="-78"/>
                 <a:cs typeface="Amiri" pitchFamily="2" charset="-78"/>
               </a:rPr>
               <a:t>فِي الشَّهْرِ المَاضِي ______ ، فَأَعْجَبَنِي ______ .</a:t>
@@ -26468,6 +26618,7 @@
                   <a:srgbClr val="1B3B6F"/>
                 </a:solidFill>
                 <a:latin typeface="Amiri" pitchFamily="2" charset="-78"/>
+                <a:ea typeface="Amiri" pitchFamily="2" charset="-78"/>
                 <a:cs typeface="Amiri" pitchFamily="2" charset="-78"/>
               </a:rPr>
               <a:t>إِذَا لَمْ أُقْبَلْ، فَسَأَدْرُسُ ______ . هَلْ تُسَاعِدِينَنِي ______ ؟</a:t>
@@ -26674,6 +26825,7 @@
                   <a:srgbClr val="1B3B6F"/>
                 </a:solidFill>
                 <a:latin typeface="Amiri" pitchFamily="2" charset="-78"/>
+                <a:ea typeface="Amiri" pitchFamily="2" charset="-78"/>
                 <a:cs typeface="Amiri" pitchFamily="2" charset="-78"/>
               </a:rPr>
               <a:t>مَعَ حُبِّي، ______</a:t>
@@ -26913,13 +27065,9 @@
     <a:fontScheme name="Office">
       <a:majorFont>
         <a:latin typeface="Calibri Light" panose="020F0302020204030204"/>
-        <a:ea typeface=""/>
-        <a:cs typeface=""/>
-        <a:font script="Jpan" typeface="游ゴシック Light"/>
-        <a:font script="Hang" typeface="맑은 고딕"/>
-        <a:font script="Hans" typeface="等线 Light"/>
-        <a:font script="Hant" typeface="新細明體"/>
-        <a:font script="Arab" typeface="Times New Roman"/>
+        <a:ea typeface="Amiri" pitchFamily="2" charset="-78"/>
+        <a:cs typeface="Amiri" pitchFamily="2" charset="-78"/>
+        <a:font script="Arab" typeface="Amiri"/>
         <a:font script="Hebr" typeface="Times New Roman"/>
         <a:font script="Thai" typeface="Angsana New"/>
         <a:font script="Ethi" typeface="Nyala"/>
@@ -26965,13 +27113,9 @@
       </a:majorFont>
       <a:minorFont>
         <a:latin typeface="Calibri" panose="020F0502020204030204"/>
-        <a:ea typeface=""/>
-        <a:cs typeface=""/>
-        <a:font script="Jpan" typeface="游ゴシック"/>
-        <a:font script="Hang" typeface="맑은 고딕"/>
-        <a:font script="Hans" typeface="等线"/>
-        <a:font script="Hant" typeface="新細明體"/>
-        <a:font script="Arab" typeface="Arial"/>
+        <a:ea typeface="Amiri" pitchFamily="2" charset="-78"/>
+        <a:cs typeface="Amiri" pitchFamily="2" charset="-78"/>
+        <a:font script="Arab" typeface="Amiri"/>
         <a:font script="Hebr" typeface="Arial"/>
         <a:font script="Thai" typeface="Cordia New"/>
         <a:font script="Ethi" typeface="Nyala"/>

--- a/Topic_D/Exam_Practice/TD-L10_Writing_Workshop_Career_Plans_Ambitions_and_Choices.pptx
+++ b/Topic_D/Exam_Practice/TD-L10_Writing_Workshop_Career_Plans_Ambitions_and_Choices.pptx
@@ -3848,7 +3848,7 @@
                 <a:solidFill>
                   <a:srgbClr val="FFFFFF"/>
                 </a:solidFill>
-                <a:latin typeface="Calibri" pitchFamily="34" charset="0"/>
+                <a:latin typeface="Amiri" pitchFamily="2" charset="-78"/>
                 <a:ea typeface="Amiri" pitchFamily="2" charset="-78"/>
                 <a:cs typeface="Amiri" pitchFamily="2" charset="-78"/>
               </a:rPr>
@@ -3914,7 +3914,7 @@
                 <a:solidFill>
                   <a:srgbClr val="FFFFFF"/>
                 </a:solidFill>
-                <a:latin typeface="Calibri" pitchFamily="34" charset="0"/>
+                <a:latin typeface="Amiri" pitchFamily="2" charset="-78"/>
                 <a:ea typeface="Amiri" pitchFamily="2" charset="-78"/>
                 <a:cs typeface="Amiri" pitchFamily="2" charset="-78"/>
               </a:rPr>
@@ -3980,7 +3980,7 @@
                 <a:solidFill>
                   <a:srgbClr val="FFFFFF"/>
                 </a:solidFill>
-                <a:latin typeface="Calibri" pitchFamily="34" charset="0"/>
+                <a:latin typeface="Amiri" pitchFamily="2" charset="-78"/>
                 <a:ea typeface="Amiri" pitchFamily="2" charset="-78"/>
                 <a:cs typeface="Amiri" pitchFamily="2" charset="-78"/>
               </a:rPr>
@@ -4046,7 +4046,7 @@
                 <a:solidFill>
                   <a:srgbClr val="FFFFFF"/>
                 </a:solidFill>
-                <a:latin typeface="Calibri" pitchFamily="34" charset="0"/>
+                <a:latin typeface="Amiri" pitchFamily="2" charset="-78"/>
                 <a:ea typeface="Amiri" pitchFamily="2" charset="-78"/>
                 <a:cs typeface="Amiri" pitchFamily="2" charset="-78"/>
               </a:rPr>
@@ -4844,7 +4844,7 @@
                 <a:solidFill>
                   <a:srgbClr val="FFFFFF"/>
                 </a:solidFill>
-                <a:latin typeface="Calibri" pitchFamily="34" charset="0"/>
+                <a:latin typeface="Amiri" pitchFamily="2" charset="-78"/>
                 <a:ea typeface="Amiri" pitchFamily="2" charset="-78"/>
                 <a:cs typeface="Amiri" pitchFamily="2" charset="-78"/>
               </a:rPr>
@@ -4910,7 +4910,7 @@
                 <a:solidFill>
                   <a:srgbClr val="FFFFFF"/>
                 </a:solidFill>
-                <a:latin typeface="Calibri" pitchFamily="34" charset="0"/>
+                <a:latin typeface="Amiri" pitchFamily="2" charset="-78"/>
                 <a:ea typeface="Amiri" pitchFamily="2" charset="-78"/>
                 <a:cs typeface="Amiri" pitchFamily="2" charset="-78"/>
               </a:rPr>
@@ -4976,7 +4976,7 @@
                 <a:solidFill>
                   <a:srgbClr val="FFFFFF"/>
                 </a:solidFill>
-                <a:latin typeface="Calibri" pitchFamily="34" charset="0"/>
+                <a:latin typeface="Amiri" pitchFamily="2" charset="-78"/>
                 <a:ea typeface="Amiri" pitchFamily="2" charset="-78"/>
                 <a:cs typeface="Amiri" pitchFamily="2" charset="-78"/>
               </a:rPr>
@@ -5042,7 +5042,7 @@
                 <a:solidFill>
                   <a:srgbClr val="FFFFFF"/>
                 </a:solidFill>
-                <a:latin typeface="Calibri" pitchFamily="34" charset="0"/>
+                <a:latin typeface="Amiri" pitchFamily="2" charset="-78"/>
                 <a:ea typeface="Amiri" pitchFamily="2" charset="-78"/>
                 <a:cs typeface="Amiri" pitchFamily="2" charset="-78"/>
               </a:rPr>
@@ -8599,7 +8599,7 @@
                 <a:solidFill>
                   <a:srgbClr val="FFFFFF"/>
                 </a:solidFill>
-                <a:latin typeface="Calibri" pitchFamily="34" charset="0"/>
+                <a:latin typeface="Amiri" pitchFamily="2" charset="-78"/>
                 <a:ea typeface="Amiri" pitchFamily="2" charset="-78"/>
                 <a:cs typeface="Amiri" pitchFamily="2" charset="-78"/>
               </a:rPr>
@@ -8665,7 +8665,7 @@
                 <a:solidFill>
                   <a:srgbClr val="FFFFFF"/>
                 </a:solidFill>
-                <a:latin typeface="Calibri" pitchFamily="34" charset="0"/>
+                <a:latin typeface="Amiri" pitchFamily="2" charset="-78"/>
                 <a:ea typeface="Amiri" pitchFamily="2" charset="-78"/>
                 <a:cs typeface="Amiri" pitchFamily="2" charset="-78"/>
               </a:rPr>
@@ -8731,7 +8731,7 @@
                 <a:solidFill>
                   <a:srgbClr val="FFFFFF"/>
                 </a:solidFill>
-                <a:latin typeface="Calibri" pitchFamily="34" charset="0"/>
+                <a:latin typeface="Amiri" pitchFamily="2" charset="-78"/>
                 <a:ea typeface="Amiri" pitchFamily="2" charset="-78"/>
                 <a:cs typeface="Amiri" pitchFamily="2" charset="-78"/>
               </a:rPr>
@@ -8797,7 +8797,7 @@
                 <a:solidFill>
                   <a:srgbClr val="FFFFFF"/>
                 </a:solidFill>
-                <a:latin typeface="Calibri" pitchFamily="34" charset="0"/>
+                <a:latin typeface="Amiri" pitchFamily="2" charset="-78"/>
                 <a:ea typeface="Amiri" pitchFamily="2" charset="-78"/>
                 <a:cs typeface="Amiri" pitchFamily="2" charset="-78"/>
               </a:rPr>
@@ -9584,7 +9584,7 @@
                 <a:solidFill>
                   <a:srgbClr val="FFFFFF"/>
                 </a:solidFill>
-                <a:latin typeface="Calibri" pitchFamily="34" charset="0"/>
+                <a:latin typeface="Amiri" pitchFamily="2" charset="-78"/>
                 <a:ea typeface="Amiri" pitchFamily="2" charset="-78"/>
                 <a:cs typeface="Amiri" pitchFamily="2" charset="-78"/>
               </a:rPr>
@@ -9650,7 +9650,7 @@
                 <a:solidFill>
                   <a:srgbClr val="FFFFFF"/>
                 </a:solidFill>
-                <a:latin typeface="Calibri" pitchFamily="34" charset="0"/>
+                <a:latin typeface="Amiri" pitchFamily="2" charset="-78"/>
                 <a:ea typeface="Amiri" pitchFamily="2" charset="-78"/>
                 <a:cs typeface="Amiri" pitchFamily="2" charset="-78"/>
               </a:rPr>
@@ -9716,7 +9716,7 @@
                 <a:solidFill>
                   <a:srgbClr val="FFFFFF"/>
                 </a:solidFill>
-                <a:latin typeface="Calibri" pitchFamily="34" charset="0"/>
+                <a:latin typeface="Amiri" pitchFamily="2" charset="-78"/>
                 <a:ea typeface="Amiri" pitchFamily="2" charset="-78"/>
                 <a:cs typeface="Amiri" pitchFamily="2" charset="-78"/>
               </a:rPr>
@@ -9782,7 +9782,7 @@
                 <a:solidFill>
                   <a:srgbClr val="FFFFFF"/>
                 </a:solidFill>
-                <a:latin typeface="Calibri" pitchFamily="34" charset="0"/>
+                <a:latin typeface="Amiri" pitchFamily="2" charset="-78"/>
                 <a:ea typeface="Amiri" pitchFamily="2" charset="-78"/>
                 <a:cs typeface="Amiri" pitchFamily="2" charset="-78"/>
               </a:rPr>
@@ -10569,7 +10569,7 @@
                 <a:solidFill>
                   <a:srgbClr val="FFFFFF"/>
                 </a:solidFill>
-                <a:latin typeface="Calibri" pitchFamily="34" charset="0"/>
+                <a:latin typeface="Amiri" pitchFamily="2" charset="-78"/>
                 <a:ea typeface="Amiri" pitchFamily="2" charset="-78"/>
                 <a:cs typeface="Amiri" pitchFamily="2" charset="-78"/>
               </a:rPr>
@@ -10635,7 +10635,7 @@
                 <a:solidFill>
                   <a:srgbClr val="FFFFFF"/>
                 </a:solidFill>
-                <a:latin typeface="Calibri" pitchFamily="34" charset="0"/>
+                <a:latin typeface="Amiri" pitchFamily="2" charset="-78"/>
                 <a:ea typeface="Amiri" pitchFamily="2" charset="-78"/>
                 <a:cs typeface="Amiri" pitchFamily="2" charset="-78"/>
               </a:rPr>
@@ -10701,7 +10701,7 @@
                 <a:solidFill>
                   <a:srgbClr val="FFFFFF"/>
                 </a:solidFill>
-                <a:latin typeface="Calibri" pitchFamily="34" charset="0"/>
+                <a:latin typeface="Amiri" pitchFamily="2" charset="-78"/>
                 <a:ea typeface="Amiri" pitchFamily="2" charset="-78"/>
                 <a:cs typeface="Amiri" pitchFamily="2" charset="-78"/>
               </a:rPr>
@@ -10767,7 +10767,7 @@
                 <a:solidFill>
                   <a:srgbClr val="FFFFFF"/>
                 </a:solidFill>
-                <a:latin typeface="Calibri" pitchFamily="34" charset="0"/>
+                <a:latin typeface="Amiri" pitchFamily="2" charset="-78"/>
                 <a:ea typeface="Amiri" pitchFamily="2" charset="-78"/>
                 <a:cs typeface="Amiri" pitchFamily="2" charset="-78"/>
               </a:rPr>
